--- a/docs/workshop/vertiefungen/WMDG-Workshop-Vertiefungen-Kopf-verstehen.pptx
+++ b/docs/workshop/vertiefungen/WMDG-Workshop-Vertiefungen-Kopf-verstehen.pptx
@@ -3272,7 +3272,7 @@
         </p:blipFill>
         <p:spPr>
           <a:xfrm>
-            <a:off x="777240" y="777240"/>
+            <a:off x="777240" y="685800"/>
             <a:ext cx="1371600" cy="1371600"/>
           </a:xfrm>
           <a:prstGeom prst="rect">
@@ -3288,7 +3288,7 @@
         </p:nvSpPr>
         <p:spPr>
           <a:xfrm>
-            <a:off x="777240" y="777240"/>
+            <a:off x="777240" y="685800"/>
             <a:ext cx="1371600" cy="1371600"/>
           </a:xfrm>
           <a:prstGeom prst="rect">
@@ -3327,7 +3327,7 @@
         </p:nvSpPr>
         <p:spPr>
           <a:xfrm>
-            <a:off x="2423160" y="868680"/>
+            <a:off x="2423160" y="640080"/>
             <a:ext cx="7315200" cy="365760"/>
           </a:xfrm>
           <a:prstGeom prst="rect">
@@ -3366,7 +3366,7 @@
         </p:nvSpPr>
         <p:spPr>
           <a:xfrm>
-            <a:off x="2377440" y="1188720"/>
+            <a:off x="2377440" y="960120"/>
             <a:ext cx="9052560" cy="914400"/>
           </a:xfrm>
           <a:prstGeom prst="rect">
@@ -3405,7 +3405,7 @@
         </p:nvSpPr>
         <p:spPr>
           <a:xfrm>
-            <a:off x="2395728" y="2148840"/>
+            <a:off x="2395728" y="1874520"/>
             <a:ext cx="9052560" cy="548640"/>
           </a:xfrm>
           <a:prstGeom prst="rect">
@@ -3634,7 +3634,7 @@
         </p:blipFill>
         <p:spPr>
           <a:xfrm>
-            <a:off x="777240" y="777240"/>
+            <a:off x="777240" y="685800"/>
             <a:ext cx="1371600" cy="1371600"/>
           </a:xfrm>
           <a:prstGeom prst="rect">
@@ -3650,7 +3650,7 @@
         </p:nvSpPr>
         <p:spPr>
           <a:xfrm>
-            <a:off x="777240" y="777240"/>
+            <a:off x="777240" y="685800"/>
             <a:ext cx="1371600" cy="1371600"/>
           </a:xfrm>
           <a:prstGeom prst="rect">
@@ -3689,7 +3689,7 @@
         </p:nvSpPr>
         <p:spPr>
           <a:xfrm>
-            <a:off x="2423160" y="868680"/>
+            <a:off x="2423160" y="640080"/>
             <a:ext cx="7315200" cy="365760"/>
           </a:xfrm>
           <a:prstGeom prst="rect">
@@ -3728,7 +3728,7 @@
         </p:nvSpPr>
         <p:spPr>
           <a:xfrm>
-            <a:off x="2377440" y="1188720"/>
+            <a:off x="2377440" y="960120"/>
             <a:ext cx="9052560" cy="914400"/>
           </a:xfrm>
           <a:prstGeom prst="rect">
@@ -3767,7 +3767,7 @@
         </p:nvSpPr>
         <p:spPr>
           <a:xfrm>
-            <a:off x="2395728" y="2148840"/>
+            <a:off x="2395728" y="1874520"/>
             <a:ext cx="9052560" cy="548640"/>
           </a:xfrm>
           <a:prstGeom prst="rect">
@@ -3996,7 +3996,7 @@
         </p:blipFill>
         <p:spPr>
           <a:xfrm>
-            <a:off x="777240" y="777240"/>
+            <a:off x="777240" y="685800"/>
             <a:ext cx="1371600" cy="1371600"/>
           </a:xfrm>
           <a:prstGeom prst="rect">
@@ -4012,7 +4012,7 @@
         </p:nvSpPr>
         <p:spPr>
           <a:xfrm>
-            <a:off x="777240" y="777240"/>
+            <a:off x="777240" y="685800"/>
             <a:ext cx="1371600" cy="1371600"/>
           </a:xfrm>
           <a:prstGeom prst="rect">
@@ -4051,7 +4051,7 @@
         </p:nvSpPr>
         <p:spPr>
           <a:xfrm>
-            <a:off x="2423160" y="868680"/>
+            <a:off x="2423160" y="640080"/>
             <a:ext cx="7315200" cy="365760"/>
           </a:xfrm>
           <a:prstGeom prst="rect">
@@ -4090,7 +4090,7 @@
         </p:nvSpPr>
         <p:spPr>
           <a:xfrm>
-            <a:off x="2377440" y="1188720"/>
+            <a:off x="2377440" y="960120"/>
             <a:ext cx="9052560" cy="914400"/>
           </a:xfrm>
           <a:prstGeom prst="rect">
@@ -4129,7 +4129,7 @@
         </p:nvSpPr>
         <p:spPr>
           <a:xfrm>
-            <a:off x="2395728" y="2148840"/>
+            <a:off x="2395728" y="1874520"/>
             <a:ext cx="9052560" cy="548640"/>
           </a:xfrm>
           <a:prstGeom prst="rect">
@@ -4358,7 +4358,7 @@
         </p:blipFill>
         <p:spPr>
           <a:xfrm>
-            <a:off x="777240" y="777240"/>
+            <a:off x="777240" y="685800"/>
             <a:ext cx="1371600" cy="1371600"/>
           </a:xfrm>
           <a:prstGeom prst="rect">
@@ -4374,7 +4374,7 @@
         </p:nvSpPr>
         <p:spPr>
           <a:xfrm>
-            <a:off x="777240" y="777240"/>
+            <a:off x="777240" y="685800"/>
             <a:ext cx="1371600" cy="1371600"/>
           </a:xfrm>
           <a:prstGeom prst="rect">
@@ -4413,7 +4413,7 @@
         </p:nvSpPr>
         <p:spPr>
           <a:xfrm>
-            <a:off x="2423160" y="868680"/>
+            <a:off x="2423160" y="640080"/>
             <a:ext cx="7315200" cy="365760"/>
           </a:xfrm>
           <a:prstGeom prst="rect">
@@ -4452,7 +4452,7 @@
         </p:nvSpPr>
         <p:spPr>
           <a:xfrm>
-            <a:off x="2377440" y="1188720"/>
+            <a:off x="2377440" y="960120"/>
             <a:ext cx="9052560" cy="914400"/>
           </a:xfrm>
           <a:prstGeom prst="rect">
@@ -4491,7 +4491,7 @@
         </p:nvSpPr>
         <p:spPr>
           <a:xfrm>
-            <a:off x="2395728" y="2148840"/>
+            <a:off x="2395728" y="1874520"/>
             <a:ext cx="9052560" cy="548640"/>
           </a:xfrm>
           <a:prstGeom prst="rect">
@@ -4720,7 +4720,7 @@
         </p:blipFill>
         <p:spPr>
           <a:xfrm>
-            <a:off x="777240" y="777240"/>
+            <a:off x="777240" y="685800"/>
             <a:ext cx="1371600" cy="1371600"/>
           </a:xfrm>
           <a:prstGeom prst="rect">
@@ -4736,7 +4736,7 @@
         </p:nvSpPr>
         <p:spPr>
           <a:xfrm>
-            <a:off x="777240" y="777240"/>
+            <a:off x="777240" y="685800"/>
             <a:ext cx="1371600" cy="1371600"/>
           </a:xfrm>
           <a:prstGeom prst="rect">
@@ -4775,7 +4775,7 @@
         </p:nvSpPr>
         <p:spPr>
           <a:xfrm>
-            <a:off x="2423160" y="868680"/>
+            <a:off x="2423160" y="640080"/>
             <a:ext cx="7315200" cy="365760"/>
           </a:xfrm>
           <a:prstGeom prst="rect">
@@ -4814,7 +4814,7 @@
         </p:nvSpPr>
         <p:spPr>
           <a:xfrm>
-            <a:off x="2377440" y="1188720"/>
+            <a:off x="2377440" y="960120"/>
             <a:ext cx="9052560" cy="914400"/>
           </a:xfrm>
           <a:prstGeom prst="rect">
@@ -4853,7 +4853,7 @@
         </p:nvSpPr>
         <p:spPr>
           <a:xfrm>
-            <a:off x="2395728" y="2148840"/>
+            <a:off x="2395728" y="1874520"/>
             <a:ext cx="9052560" cy="548640"/>
           </a:xfrm>
           <a:prstGeom prst="rect">
@@ -5082,7 +5082,7 @@
         </p:blipFill>
         <p:spPr>
           <a:xfrm>
-            <a:off x="777240" y="777240"/>
+            <a:off x="777240" y="685800"/>
             <a:ext cx="1371600" cy="1371600"/>
           </a:xfrm>
           <a:prstGeom prst="rect">
@@ -5098,7 +5098,7 @@
         </p:nvSpPr>
         <p:spPr>
           <a:xfrm>
-            <a:off x="777240" y="777240"/>
+            <a:off x="777240" y="685800"/>
             <a:ext cx="1371600" cy="1371600"/>
           </a:xfrm>
           <a:prstGeom prst="rect">
@@ -5137,7 +5137,7 @@
         </p:nvSpPr>
         <p:spPr>
           <a:xfrm>
-            <a:off x="2423160" y="868680"/>
+            <a:off x="2423160" y="640080"/>
             <a:ext cx="7315200" cy="365760"/>
           </a:xfrm>
           <a:prstGeom prst="rect">
@@ -5176,7 +5176,7 @@
         </p:nvSpPr>
         <p:spPr>
           <a:xfrm>
-            <a:off x="2377440" y="1188720"/>
+            <a:off x="2377440" y="960120"/>
             <a:ext cx="9052560" cy="914400"/>
           </a:xfrm>
           <a:prstGeom prst="rect">
@@ -5215,7 +5215,7 @@
         </p:nvSpPr>
         <p:spPr>
           <a:xfrm>
-            <a:off x="2395728" y="2148840"/>
+            <a:off x="2395728" y="1874520"/>
             <a:ext cx="9052560" cy="548640"/>
           </a:xfrm>
           <a:prstGeom prst="rect">
@@ -5444,7 +5444,7 @@
         </p:blipFill>
         <p:spPr>
           <a:xfrm>
-            <a:off x="777240" y="777240"/>
+            <a:off x="777240" y="685800"/>
             <a:ext cx="1371600" cy="1371600"/>
           </a:xfrm>
           <a:prstGeom prst="rect">
@@ -5460,7 +5460,7 @@
         </p:nvSpPr>
         <p:spPr>
           <a:xfrm>
-            <a:off x="777240" y="777240"/>
+            <a:off x="777240" y="685800"/>
             <a:ext cx="1371600" cy="1371600"/>
           </a:xfrm>
           <a:prstGeom prst="rect">
@@ -5499,7 +5499,7 @@
         </p:nvSpPr>
         <p:spPr>
           <a:xfrm>
-            <a:off x="2423160" y="868680"/>
+            <a:off x="2423160" y="640080"/>
             <a:ext cx="7315200" cy="365760"/>
           </a:xfrm>
           <a:prstGeom prst="rect">
@@ -5538,7 +5538,7 @@
         </p:nvSpPr>
         <p:spPr>
           <a:xfrm>
-            <a:off x="2377440" y="1188720"/>
+            <a:off x="2377440" y="960120"/>
             <a:ext cx="9052560" cy="914400"/>
           </a:xfrm>
           <a:prstGeom prst="rect">
@@ -5577,7 +5577,7 @@
         </p:nvSpPr>
         <p:spPr>
           <a:xfrm>
-            <a:off x="2395728" y="2148840"/>
+            <a:off x="2395728" y="1874520"/>
             <a:ext cx="9052560" cy="548640"/>
           </a:xfrm>
           <a:prstGeom prst="rect">
@@ -5806,7 +5806,7 @@
         </p:blipFill>
         <p:spPr>
           <a:xfrm>
-            <a:off x="777240" y="777240"/>
+            <a:off x="777240" y="685800"/>
             <a:ext cx="1371600" cy="1371600"/>
           </a:xfrm>
           <a:prstGeom prst="rect">
@@ -5822,7 +5822,7 @@
         </p:nvSpPr>
         <p:spPr>
           <a:xfrm>
-            <a:off x="777240" y="777240"/>
+            <a:off x="777240" y="685800"/>
             <a:ext cx="1371600" cy="1371600"/>
           </a:xfrm>
           <a:prstGeom prst="rect">
@@ -5861,7 +5861,7 @@
         </p:nvSpPr>
         <p:spPr>
           <a:xfrm>
-            <a:off x="2423160" y="868680"/>
+            <a:off x="2423160" y="640080"/>
             <a:ext cx="7315200" cy="365760"/>
           </a:xfrm>
           <a:prstGeom prst="rect">
@@ -5900,7 +5900,7 @@
         </p:nvSpPr>
         <p:spPr>
           <a:xfrm>
-            <a:off x="2377440" y="1188720"/>
+            <a:off x="2377440" y="960120"/>
             <a:ext cx="9052560" cy="914400"/>
           </a:xfrm>
           <a:prstGeom prst="rect">
@@ -5939,7 +5939,7 @@
         </p:nvSpPr>
         <p:spPr>
           <a:xfrm>
-            <a:off x="2395728" y="2148840"/>
+            <a:off x="2395728" y="1874520"/>
             <a:ext cx="9052560" cy="548640"/>
           </a:xfrm>
           <a:prstGeom prst="rect">
@@ -6168,7 +6168,7 @@
         </p:blipFill>
         <p:spPr>
           <a:xfrm>
-            <a:off x="777240" y="777240"/>
+            <a:off x="777240" y="685800"/>
             <a:ext cx="1371600" cy="1371600"/>
           </a:xfrm>
           <a:prstGeom prst="rect">
@@ -6184,7 +6184,7 @@
         </p:nvSpPr>
         <p:spPr>
           <a:xfrm>
-            <a:off x="777240" y="777240"/>
+            <a:off x="777240" y="685800"/>
             <a:ext cx="1371600" cy="1371600"/>
           </a:xfrm>
           <a:prstGeom prst="rect">
@@ -6223,7 +6223,7 @@
         </p:nvSpPr>
         <p:spPr>
           <a:xfrm>
-            <a:off x="2423160" y="868680"/>
+            <a:off x="2423160" y="640080"/>
             <a:ext cx="7315200" cy="365760"/>
           </a:xfrm>
           <a:prstGeom prst="rect">
@@ -6262,7 +6262,7 @@
         </p:nvSpPr>
         <p:spPr>
           <a:xfrm>
-            <a:off x="2377440" y="1188720"/>
+            <a:off x="2377440" y="960120"/>
             <a:ext cx="9052560" cy="914400"/>
           </a:xfrm>
           <a:prstGeom prst="rect">
@@ -6301,7 +6301,7 @@
         </p:nvSpPr>
         <p:spPr>
           <a:xfrm>
-            <a:off x="2395728" y="2148840"/>
+            <a:off x="2395728" y="1874520"/>
             <a:ext cx="9052560" cy="548640"/>
           </a:xfrm>
           <a:prstGeom prst="rect">
@@ -6530,7 +6530,7 @@
         </p:blipFill>
         <p:spPr>
           <a:xfrm>
-            <a:off x="777240" y="777240"/>
+            <a:off x="777240" y="685800"/>
             <a:ext cx="1371600" cy="1371600"/>
           </a:xfrm>
           <a:prstGeom prst="rect">
@@ -6546,7 +6546,7 @@
         </p:nvSpPr>
         <p:spPr>
           <a:xfrm>
-            <a:off x="777240" y="777240"/>
+            <a:off x="777240" y="685800"/>
             <a:ext cx="1371600" cy="1371600"/>
           </a:xfrm>
           <a:prstGeom prst="rect">
@@ -6585,7 +6585,7 @@
         </p:nvSpPr>
         <p:spPr>
           <a:xfrm>
-            <a:off x="2423160" y="868680"/>
+            <a:off x="2423160" y="640080"/>
             <a:ext cx="7315200" cy="365760"/>
           </a:xfrm>
           <a:prstGeom prst="rect">
@@ -6624,7 +6624,7 @@
         </p:nvSpPr>
         <p:spPr>
           <a:xfrm>
-            <a:off x="2377440" y="1188720"/>
+            <a:off x="2377440" y="960120"/>
             <a:ext cx="9052560" cy="914400"/>
           </a:xfrm>
           <a:prstGeom prst="rect">
@@ -6663,7 +6663,7 @@
         </p:nvSpPr>
         <p:spPr>
           <a:xfrm>
-            <a:off x="2395728" y="2148840"/>
+            <a:off x="2395728" y="1874520"/>
             <a:ext cx="9052560" cy="548640"/>
           </a:xfrm>
           <a:prstGeom prst="rect">
@@ -7707,7 +7707,7 @@
         </p:blipFill>
         <p:spPr>
           <a:xfrm>
-            <a:off x="777240" y="777240"/>
+            <a:off x="777240" y="685800"/>
             <a:ext cx="1371600" cy="1371600"/>
           </a:xfrm>
           <a:prstGeom prst="rect">
@@ -7723,7 +7723,7 @@
         </p:nvSpPr>
         <p:spPr>
           <a:xfrm>
-            <a:off x="777240" y="777240"/>
+            <a:off x="777240" y="685800"/>
             <a:ext cx="1371600" cy="1371600"/>
           </a:xfrm>
           <a:prstGeom prst="rect">
@@ -7762,7 +7762,7 @@
         </p:nvSpPr>
         <p:spPr>
           <a:xfrm>
-            <a:off x="2423160" y="868680"/>
+            <a:off x="2423160" y="640080"/>
             <a:ext cx="7315200" cy="365760"/>
           </a:xfrm>
           <a:prstGeom prst="rect">
@@ -7801,7 +7801,7 @@
         </p:nvSpPr>
         <p:spPr>
           <a:xfrm>
-            <a:off x="2377440" y="1188720"/>
+            <a:off x="2377440" y="960120"/>
             <a:ext cx="9052560" cy="914400"/>
           </a:xfrm>
           <a:prstGeom prst="rect">
@@ -7840,7 +7840,7 @@
         </p:nvSpPr>
         <p:spPr>
           <a:xfrm>
-            <a:off x="2395728" y="2148840"/>
+            <a:off x="2395728" y="1874520"/>
             <a:ext cx="9052560" cy="548640"/>
           </a:xfrm>
           <a:prstGeom prst="rect">
@@ -8069,7 +8069,7 @@
         </p:blipFill>
         <p:spPr>
           <a:xfrm>
-            <a:off x="777240" y="777240"/>
+            <a:off x="777240" y="685800"/>
             <a:ext cx="1371600" cy="1371600"/>
           </a:xfrm>
           <a:prstGeom prst="rect">
@@ -8085,7 +8085,7 @@
         </p:nvSpPr>
         <p:spPr>
           <a:xfrm>
-            <a:off x="777240" y="777240"/>
+            <a:off x="777240" y="685800"/>
             <a:ext cx="1371600" cy="1371600"/>
           </a:xfrm>
           <a:prstGeom prst="rect">
@@ -8124,7 +8124,7 @@
         </p:nvSpPr>
         <p:spPr>
           <a:xfrm>
-            <a:off x="2423160" y="868680"/>
+            <a:off x="2423160" y="640080"/>
             <a:ext cx="7315200" cy="365760"/>
           </a:xfrm>
           <a:prstGeom prst="rect">
@@ -8163,7 +8163,7 @@
         </p:nvSpPr>
         <p:spPr>
           <a:xfrm>
-            <a:off x="2377440" y="1188720"/>
+            <a:off x="2377440" y="960120"/>
             <a:ext cx="9052560" cy="914400"/>
           </a:xfrm>
           <a:prstGeom prst="rect">
@@ -8202,7 +8202,7 @@
         </p:nvSpPr>
         <p:spPr>
           <a:xfrm>
-            <a:off x="2395728" y="2148840"/>
+            <a:off x="2395728" y="1874520"/>
             <a:ext cx="9052560" cy="548640"/>
           </a:xfrm>
           <a:prstGeom prst="rect">
@@ -11577,7 +11577,7 @@
         </p:nvSpPr>
         <p:spPr>
           <a:xfrm>
-            <a:off x="731520" y="502920"/>
+            <a:off x="731520" y="640080"/>
             <a:ext cx="7315200" cy="274320"/>
           </a:xfrm>
           <a:prstGeom prst="rect">
@@ -11616,7 +11616,7 @@
         </p:nvSpPr>
         <p:spPr>
           <a:xfrm>
-            <a:off x="731520" y="822960"/>
+            <a:off x="731520" y="960120"/>
             <a:ext cx="10698480" cy="822960"/>
           </a:xfrm>
           <a:prstGeom prst="rect">
@@ -12839,7 +12839,7 @@
         </p:nvSpPr>
         <p:spPr>
           <a:xfrm>
-            <a:off x="731520" y="502920"/>
+            <a:off x="731520" y="640080"/>
             <a:ext cx="7315200" cy="274320"/>
           </a:xfrm>
           <a:prstGeom prst="rect">
@@ -12878,7 +12878,7 @@
         </p:nvSpPr>
         <p:spPr>
           <a:xfrm>
-            <a:off x="731520" y="822960"/>
+            <a:off x="731520" y="960120"/>
             <a:ext cx="10698480" cy="822960"/>
           </a:xfrm>
           <a:prstGeom prst="rect">
@@ -13677,7 +13677,7 @@
         </p:blipFill>
         <p:spPr>
           <a:xfrm>
-            <a:off x="777240" y="777240"/>
+            <a:off x="777240" y="685800"/>
             <a:ext cx="1371600" cy="1371600"/>
           </a:xfrm>
           <a:prstGeom prst="rect">
@@ -13693,7 +13693,7 @@
         </p:nvSpPr>
         <p:spPr>
           <a:xfrm>
-            <a:off x="777240" y="777240"/>
+            <a:off x="777240" y="685800"/>
             <a:ext cx="1371600" cy="1371600"/>
           </a:xfrm>
           <a:prstGeom prst="rect">
@@ -13732,7 +13732,7 @@
         </p:nvSpPr>
         <p:spPr>
           <a:xfrm>
-            <a:off x="2423160" y="868680"/>
+            <a:off x="2423160" y="640080"/>
             <a:ext cx="7315200" cy="365760"/>
           </a:xfrm>
           <a:prstGeom prst="rect">
@@ -13771,7 +13771,7 @@
         </p:nvSpPr>
         <p:spPr>
           <a:xfrm>
-            <a:off x="2377440" y="1188720"/>
+            <a:off x="2377440" y="960120"/>
             <a:ext cx="9052560" cy="914400"/>
           </a:xfrm>
           <a:prstGeom prst="rect">
@@ -13810,7 +13810,7 @@
         </p:nvSpPr>
         <p:spPr>
           <a:xfrm>
-            <a:off x="2395728" y="2148840"/>
+            <a:off x="2395728" y="1874520"/>
             <a:ext cx="9052560" cy="548640"/>
           </a:xfrm>
           <a:prstGeom prst="rect">
